--- a/05-midterm-report/figures/fig-3-scheduling-comparison.pptx
+++ b/05-midterm-report/figures/fig-3-scheduling-comparison.pptx
@@ -895,13 +895,13 @@
             <a:r>
               <a:rPr lang="en-US" sz="1800" b="1" dirty="0">
                 <a:solidFill>
-                  <a:srgbClr val="1E293B"/>
-                </a:solidFill>
-                <a:latin typeface="맑은 고딕" pitchFamily="34" charset="0"/>
-                <a:ea typeface="맑은 고딕" pitchFamily="34" charset="-122"/>
-                <a:cs typeface="맑은 고딕" pitchFamily="34" charset="-120"/>
-              </a:rPr>
-              <a:t>그림 4. 스케줄링 알고리즘 비교</a:t>
+                  <a:srgbClr val="1A1A1A"/>
+                </a:solidFill>
+                <a:latin typeface="맑은 고딕" pitchFamily="34" charset="0"/>
+                <a:ea typeface="맑은 고딕" pitchFamily="34" charset="-122"/>
+                <a:cs typeface="맑은 고딕" pitchFamily="34" charset="-120"/>
+              </a:rPr>
+              <a:t>그림 3. 스케줄링 알고리즘 비교</a:t>
             </a:r>
             <a:endParaRPr lang="en-US" sz="1800" dirty="0"/>
           </a:p>
@@ -922,7 +922,7 @@
             <a:avLst/>
           </a:prstGeom>
           <a:solidFill>
-            <a:srgbClr val="CBD5E1"/>
+            <a:srgbClr val="A0A0A0"/>
           </a:solidFill>
           <a:ln w="12700">
             <a:solidFill>
@@ -947,7 +947,7 @@
             <a:avLst/>
           </a:prstGeom>
           <a:solidFill>
-            <a:srgbClr val="CBD5E1"/>
+            <a:srgbClr val="A0A0A0"/>
           </a:solidFill>
           <a:ln w="12700">
             <a:solidFill>
@@ -984,7 +984,7 @@
             <a:r>
               <a:rPr lang="en-US" sz="1200" b="1" dirty="0">
                 <a:solidFill>
-                  <a:srgbClr val="2563EB"/>
+                  <a:srgbClr val="1B3A5C"/>
                 </a:solidFill>
                 <a:latin typeface="맑은 고딕" pitchFamily="34" charset="0"/>
                 <a:ea typeface="맑은 고딕" pitchFamily="34" charset="-122"/>
@@ -1023,7 +1023,7 @@
             <a:r>
               <a:rPr lang="en-US" sz="900" i="1" dirty="0">
                 <a:solidFill>
-                  <a:srgbClr val="64748B"/>
+                  <a:srgbClr val="4A5568"/>
                 </a:solidFill>
                 <a:latin typeface="맑은 고딕" pitchFamily="34" charset="0"/>
                 <a:ea typeface="맑은 고딕" pitchFamily="34" charset="-122"/>
@@ -1050,13 +1050,13 @@
             <a:avLst/>
           </a:prstGeom>
           <a:solidFill>
-            <a:srgbClr val="2563EB">
+            <a:srgbClr val="1B3A5C">
               <a:alpha val="30000"/>
             </a:srgbClr>
           </a:solidFill>
           <a:ln w="12700">
             <a:solidFill>
-              <a:srgbClr val="2563EB"/>
+              <a:srgbClr val="1B3A5C"/>
             </a:solidFill>
             <a:prstDash val="solid"/>
           </a:ln>
@@ -1089,7 +1089,7 @@
             <a:r>
               <a:rPr lang="en-US" sz="900" dirty="0">
                 <a:solidFill>
-                  <a:srgbClr val="2563EB"/>
+                  <a:srgbClr val="1B3A5C"/>
                 </a:solidFill>
                 <a:latin typeface="맑은 고딕" pitchFamily="34" charset="0"/>
                 <a:ea typeface="맑은 고딕" pitchFamily="34" charset="-122"/>
@@ -1116,13 +1116,13 @@
             <a:avLst/>
           </a:prstGeom>
           <a:solidFill>
-            <a:srgbClr val="2563EB">
+            <a:srgbClr val="1B3A5C">
               <a:alpha val="30000"/>
             </a:srgbClr>
           </a:solidFill>
           <a:ln w="12700">
             <a:solidFill>
-              <a:srgbClr val="2563EB"/>
+              <a:srgbClr val="1B3A5C"/>
             </a:solidFill>
             <a:prstDash val="solid"/>
           </a:ln>
@@ -1155,7 +1155,7 @@
             <a:r>
               <a:rPr lang="en-US" sz="900" dirty="0">
                 <a:solidFill>
-                  <a:srgbClr val="2563EB"/>
+                  <a:srgbClr val="1B3A5C"/>
                 </a:solidFill>
                 <a:latin typeface="맑은 고딕" pitchFamily="34" charset="0"/>
                 <a:ea typeface="맑은 고딕" pitchFamily="34" charset="-122"/>
@@ -1182,13 +1182,13 @@
             <a:avLst/>
           </a:prstGeom>
           <a:solidFill>
-            <a:srgbClr val="2563EB">
+            <a:srgbClr val="1B3A5C">
               <a:alpha val="30000"/>
             </a:srgbClr>
           </a:solidFill>
           <a:ln w="12700">
             <a:solidFill>
-              <a:srgbClr val="2563EB"/>
+              <a:srgbClr val="1B3A5C"/>
             </a:solidFill>
             <a:prstDash val="solid"/>
           </a:ln>
@@ -1221,7 +1221,7 @@
             <a:r>
               <a:rPr lang="en-US" sz="900" dirty="0">
                 <a:solidFill>
-                  <a:srgbClr val="2563EB"/>
+                  <a:srgbClr val="1B3A5C"/>
                 </a:solidFill>
                 <a:latin typeface="맑은 고딕" pitchFamily="34" charset="0"/>
                 <a:ea typeface="맑은 고딕" pitchFamily="34" charset="-122"/>
@@ -1248,13 +1248,13 @@
             <a:avLst/>
           </a:prstGeom>
           <a:solidFill>
-            <a:srgbClr val="2563EB">
+            <a:srgbClr val="1B3A5C">
               <a:alpha val="30000"/>
             </a:srgbClr>
           </a:solidFill>
           <a:ln w="12700">
             <a:solidFill>
-              <a:srgbClr val="2563EB"/>
+              <a:srgbClr val="1B3A5C"/>
             </a:solidFill>
             <a:prstDash val="solid"/>
           </a:ln>
@@ -1287,7 +1287,7 @@
             <a:r>
               <a:rPr lang="en-US" sz="900" dirty="0">
                 <a:solidFill>
-                  <a:srgbClr val="2563EB"/>
+                  <a:srgbClr val="1B3A5C"/>
                 </a:solidFill>
                 <a:latin typeface="맑은 고딕" pitchFamily="34" charset="0"/>
                 <a:ea typeface="맑은 고딕" pitchFamily="34" charset="-122"/>
@@ -1314,13 +1314,13 @@
             <a:avLst/>
           </a:prstGeom>
           <a:solidFill>
-            <a:srgbClr val="2563EB">
+            <a:srgbClr val="1B3A5C">
               <a:alpha val="30000"/>
             </a:srgbClr>
           </a:solidFill>
           <a:ln w="12700">
             <a:solidFill>
-              <a:srgbClr val="2563EB"/>
+              <a:srgbClr val="1B3A5C"/>
             </a:solidFill>
             <a:prstDash val="solid"/>
           </a:ln>
@@ -1353,7 +1353,7 @@
             <a:r>
               <a:rPr lang="en-US" sz="900" dirty="0">
                 <a:solidFill>
-                  <a:srgbClr val="2563EB"/>
+                  <a:srgbClr val="1B3A5C"/>
                 </a:solidFill>
                 <a:latin typeface="맑은 고딕" pitchFamily="34" charset="0"/>
                 <a:ea typeface="맑은 고딕" pitchFamily="34" charset="-122"/>
@@ -1380,7 +1380,7 @@
             <a:avLst/>
           </a:prstGeom>
           <a:solidFill>
-            <a:srgbClr val="2563EB"/>
+            <a:srgbClr val="1B3A5C"/>
           </a:solidFill>
           <a:ln/>
         </p:spPr>
@@ -1412,7 +1412,7 @@
             <a:r>
               <a:rPr lang="en-US" sz="800" dirty="0">
                 <a:solidFill>
-                  <a:srgbClr val="64748B"/>
+                  <a:srgbClr val="4A5568"/>
                 </a:solidFill>
                 <a:latin typeface="맑은 고딕" pitchFamily="34" charset="0"/>
                 <a:ea typeface="맑은 고딕" pitchFamily="34" charset="-122"/>
@@ -1451,7 +1451,7 @@
             <a:r>
               <a:rPr lang="en-US" sz="1200" b="1" dirty="0">
                 <a:solidFill>
-                  <a:srgbClr val="D97706"/>
+                  <a:srgbClr val="7C4D1A"/>
                 </a:solidFill>
                 <a:latin typeface="맑은 고딕" pitchFamily="34" charset="0"/>
                 <a:ea typeface="맑은 고딕" pitchFamily="34" charset="-122"/>
@@ -1490,7 +1490,7 @@
             <a:r>
               <a:rPr lang="en-US" sz="900" i="1" dirty="0">
                 <a:solidFill>
-                  <a:srgbClr val="64748B"/>
+                  <a:srgbClr val="4A5568"/>
                 </a:solidFill>
                 <a:latin typeface="맑은 고딕" pitchFamily="34" charset="0"/>
                 <a:ea typeface="맑은 고딕" pitchFamily="34" charset="-122"/>
@@ -1517,13 +1517,13 @@
             <a:avLst/>
           </a:prstGeom>
           <a:solidFill>
-            <a:srgbClr val="DC2626">
+            <a:srgbClr val="8B1A1A">
               <a:alpha val="30000"/>
             </a:srgbClr>
           </a:solidFill>
           <a:ln w="12700">
             <a:solidFill>
-              <a:srgbClr val="DC2626"/>
+              <a:srgbClr val="8B1A1A"/>
             </a:solidFill>
             <a:prstDash val="solid"/>
           </a:ln>
@@ -1556,7 +1556,7 @@
             <a:r>
               <a:rPr lang="en-US" sz="800" b="1" dirty="0">
                 <a:solidFill>
-                  <a:srgbClr val="DC2626"/>
+                  <a:srgbClr val="8B1A1A"/>
                 </a:solidFill>
                 <a:latin typeface="맑은 고딕" pitchFamily="34" charset="0"/>
                 <a:ea typeface="맑은 고딕" pitchFamily="34" charset="-122"/>
@@ -1583,13 +1583,13 @@
             <a:avLst/>
           </a:prstGeom>
           <a:solidFill>
-            <a:srgbClr val="EA580C">
+            <a:srgbClr val="7C4D1A">
               <a:alpha val="30000"/>
             </a:srgbClr>
           </a:solidFill>
           <a:ln w="12700">
             <a:solidFill>
-              <a:srgbClr val="EA580C"/>
+              <a:srgbClr val="7C4D1A"/>
             </a:solidFill>
             <a:prstDash val="solid"/>
           </a:ln>
@@ -1622,7 +1622,7 @@
             <a:r>
               <a:rPr lang="en-US" sz="800" b="1" dirty="0">
                 <a:solidFill>
-                  <a:srgbClr val="EA580C"/>
+                  <a:srgbClr val="7C4D1A"/>
                 </a:solidFill>
                 <a:latin typeface="맑은 고딕" pitchFamily="34" charset="0"/>
                 <a:ea typeface="맑은 고딕" pitchFamily="34" charset="-122"/>
@@ -1649,13 +1649,13 @@
             <a:avLst/>
           </a:prstGeom>
           <a:solidFill>
-            <a:srgbClr val="CA8A04">
+            <a:srgbClr val="4A5568">
               <a:alpha val="30000"/>
             </a:srgbClr>
           </a:solidFill>
           <a:ln w="12700">
             <a:solidFill>
-              <a:srgbClr val="CA8A04"/>
+              <a:srgbClr val="4A5568"/>
             </a:solidFill>
             <a:prstDash val="solid"/>
           </a:ln>
@@ -1688,7 +1688,7 @@
             <a:r>
               <a:rPr lang="en-US" sz="800" b="1" dirty="0">
                 <a:solidFill>
-                  <a:srgbClr val="CA8A04"/>
+                  <a:srgbClr val="4A5568"/>
                 </a:solidFill>
                 <a:latin typeface="맑은 고딕" pitchFamily="34" charset="0"/>
                 <a:ea typeface="맑은 고딕" pitchFamily="34" charset="-122"/>
@@ -1715,13 +1715,13 @@
             <a:avLst/>
           </a:prstGeom>
           <a:solidFill>
-            <a:srgbClr val="65A30D">
+            <a:srgbClr val="2D6A4F">
               <a:alpha val="30000"/>
             </a:srgbClr>
           </a:solidFill>
           <a:ln w="12700">
             <a:solidFill>
-              <a:srgbClr val="65A30D"/>
+              <a:srgbClr val="2D6A4F"/>
             </a:solidFill>
             <a:prstDash val="solid"/>
           </a:ln>
@@ -1754,7 +1754,7 @@
             <a:r>
               <a:rPr lang="en-US" sz="800" b="1" dirty="0">
                 <a:solidFill>
-                  <a:srgbClr val="65A30D"/>
+                  <a:srgbClr val="2D6A4F"/>
                 </a:solidFill>
                 <a:latin typeface="맑은 고딕" pitchFamily="34" charset="0"/>
                 <a:ea typeface="맑은 고딕" pitchFamily="34" charset="-122"/>
@@ -1793,7 +1793,7 @@
             <a:r>
               <a:rPr lang="en-US" sz="1200" b="1" dirty="0">
                 <a:solidFill>
-                  <a:srgbClr val="2563EB"/>
+                  <a:srgbClr val="1B3A5C"/>
                 </a:solidFill>
                 <a:latin typeface="맑은 고딕" pitchFamily="34" charset="0"/>
                 <a:ea typeface="맑은 고딕" pitchFamily="34" charset="-122"/>
@@ -1832,7 +1832,7 @@
             <a:r>
               <a:rPr lang="en-US" sz="900" i="1" dirty="0">
                 <a:solidFill>
-                  <a:srgbClr val="64748B"/>
+                  <a:srgbClr val="4A5568"/>
                 </a:solidFill>
                 <a:latin typeface="맑은 고딕" pitchFamily="34" charset="0"/>
                 <a:ea typeface="맑은 고딕" pitchFamily="34" charset="-122"/>
@@ -1859,13 +1859,13 @@
             <a:avLst/>
           </a:prstGeom>
           <a:solidFill>
-            <a:srgbClr val="2563EB">
+            <a:srgbClr val="1B3A5C">
               <a:alpha val="20000"/>
             </a:srgbClr>
           </a:solidFill>
           <a:ln w="12700">
             <a:solidFill>
-              <a:srgbClr val="2563EB"/>
+              <a:srgbClr val="1B3A5C"/>
             </a:solidFill>
             <a:prstDash val="solid"/>
           </a:ln>
@@ -1898,7 +1898,7 @@
             <a:r>
               <a:rPr lang="en-US" sz="900" dirty="0">
                 <a:solidFill>
-                  <a:srgbClr val="2563EB"/>
+                  <a:srgbClr val="1B3A5C"/>
                 </a:solidFill>
                 <a:latin typeface="맑은 고딕" pitchFamily="34" charset="0"/>
                 <a:ea typeface="맑은 고딕" pitchFamily="34" charset="-122"/>
@@ -1925,13 +1925,13 @@
             <a:avLst/>
           </a:prstGeom>
           <a:solidFill>
-            <a:srgbClr val="3B82F6">
+            <a:srgbClr val="34618E">
               <a:alpha val="20000"/>
             </a:srgbClr>
           </a:solidFill>
           <a:ln w="12700">
             <a:solidFill>
-              <a:srgbClr val="3B82F6"/>
+              <a:srgbClr val="34618E"/>
             </a:solidFill>
             <a:prstDash val="solid"/>
           </a:ln>
@@ -1964,7 +1964,7 @@
             <a:r>
               <a:rPr lang="en-US" sz="900" dirty="0">
                 <a:solidFill>
-                  <a:srgbClr val="3B82F6"/>
+                  <a:srgbClr val="34618E"/>
                 </a:solidFill>
                 <a:latin typeface="맑은 고딕" pitchFamily="34" charset="0"/>
                 <a:ea typeface="맑은 고딕" pitchFamily="34" charset="-122"/>
@@ -1991,13 +1991,13 @@
             <a:avLst/>
           </a:prstGeom>
           <a:solidFill>
-            <a:srgbClr val="60A5FA">
+            <a:srgbClr val="5A8AB5">
               <a:alpha val="20000"/>
             </a:srgbClr>
           </a:solidFill>
           <a:ln w="12700">
             <a:solidFill>
-              <a:srgbClr val="60A5FA"/>
+              <a:srgbClr val="5A8AB5"/>
             </a:solidFill>
             <a:prstDash val="solid"/>
           </a:ln>
@@ -2030,7 +2030,7 @@
             <a:r>
               <a:rPr lang="en-US" sz="900" dirty="0">
                 <a:solidFill>
-                  <a:srgbClr val="60A5FA"/>
+                  <a:srgbClr val="5A8AB5"/>
                 </a:solidFill>
                 <a:latin typeface="맑은 고딕" pitchFamily="34" charset="0"/>
                 <a:ea typeface="맑은 고딕" pitchFamily="34" charset="-122"/>
@@ -2057,13 +2057,13 @@
             <a:avLst/>
           </a:prstGeom>
           <a:solidFill>
-            <a:srgbClr val="93C5FD">
+            <a:srgbClr val="8FB3D4">
               <a:alpha val="20000"/>
             </a:srgbClr>
           </a:solidFill>
           <a:ln w="12700">
             <a:solidFill>
-              <a:srgbClr val="93C5FD"/>
+              <a:srgbClr val="8FB3D4"/>
             </a:solidFill>
             <a:prstDash val="solid"/>
           </a:ln>
@@ -2096,7 +2096,7 @@
             <a:r>
               <a:rPr lang="en-US" sz="900" dirty="0">
                 <a:solidFill>
-                  <a:srgbClr val="93C5FD"/>
+                  <a:srgbClr val="8FB3D4"/>
                 </a:solidFill>
                 <a:latin typeface="맑은 고딕" pitchFamily="34" charset="0"/>
                 <a:ea typeface="맑은 고딕" pitchFamily="34" charset="-122"/>
@@ -2123,7 +2123,7 @@
             <a:avLst/>
           </a:prstGeom>
           <a:solidFill>
-            <a:srgbClr val="CBD5E1"/>
+            <a:srgbClr val="A0A0A0"/>
           </a:solidFill>
           <a:ln/>
         </p:spPr>
@@ -2155,7 +2155,7 @@
             <a:r>
               <a:rPr lang="en-US" sz="800" dirty="0">
                 <a:solidFill>
-                  <a:srgbClr val="64748B"/>
+                  <a:srgbClr val="4A5568"/>
                 </a:solidFill>
                 <a:latin typeface="맑은 고딕" pitchFamily="34" charset="0"/>
                 <a:ea typeface="맑은 고딕" pitchFamily="34" charset="-122"/>
@@ -2172,7 +2172,7 @@
             <a:r>
               <a:rPr lang="en-US" sz="800" dirty="0">
                 <a:solidFill>
-                  <a:srgbClr val="64748B"/>
+                  <a:srgbClr val="4A5568"/>
                 </a:solidFill>
                 <a:latin typeface="맑은 고딕" pitchFamily="34" charset="0"/>
                 <a:ea typeface="맑은 고딕" pitchFamily="34" charset="-122"/>
@@ -2199,7 +2199,7 @@
             <a:avLst/>
           </a:prstGeom>
           <a:solidFill>
-            <a:srgbClr val="2563EB">
+            <a:srgbClr val="1B3A5C">
               <a:alpha val="50000"/>
             </a:srgbClr>
           </a:solidFill>
@@ -2233,7 +2233,7 @@
             <a:r>
               <a:rPr lang="en-US" sz="700" b="1" dirty="0">
                 <a:solidFill>
-                  <a:srgbClr val="2563EB"/>
+                  <a:srgbClr val="1B3A5C"/>
                 </a:solidFill>
                 <a:latin typeface="맑은 고딕" pitchFamily="34" charset="0"/>
                 <a:ea typeface="맑은 고딕" pitchFamily="34" charset="-122"/>
@@ -2272,7 +2272,7 @@
             <a:r>
               <a:rPr lang="en-US" sz="1200" b="1" dirty="0">
                 <a:solidFill>
-                  <a:srgbClr val="059669"/>
+                  <a:srgbClr val="2D6A4F"/>
                 </a:solidFill>
                 <a:latin typeface="맑은 고딕" pitchFamily="34" charset="0"/>
                 <a:ea typeface="맑은 고딕" pitchFamily="34" charset="-122"/>
@@ -2311,7 +2311,7 @@
             <a:r>
               <a:rPr lang="en-US" sz="900" i="1" dirty="0">
                 <a:solidFill>
-                  <a:srgbClr val="64748B"/>
+                  <a:srgbClr val="4A5568"/>
                 </a:solidFill>
                 <a:latin typeface="맑은 고딕" pitchFamily="34" charset="0"/>
                 <a:ea typeface="맑은 고딕" pitchFamily="34" charset="-122"/>
@@ -2338,13 +2338,13 @@
             <a:avLst/>
           </a:prstGeom>
           <a:solidFill>
-            <a:srgbClr val="059669">
+            <a:srgbClr val="2D6A4F">
               <a:alpha val="30000"/>
             </a:srgbClr>
           </a:solidFill>
           <a:ln w="12700">
             <a:solidFill>
-              <a:srgbClr val="059669"/>
+              <a:srgbClr val="2D6A4F"/>
             </a:solidFill>
             <a:prstDash val="solid"/>
           </a:ln>
@@ -2377,7 +2377,7 @@
             <a:r>
               <a:rPr lang="en-US" sz="800" dirty="0">
                 <a:solidFill>
-                  <a:srgbClr val="059669"/>
+                  <a:srgbClr val="2D6A4F"/>
                 </a:solidFill>
                 <a:latin typeface="맑은 고딕" pitchFamily="34" charset="0"/>
                 <a:ea typeface="맑은 고딕" pitchFamily="34" charset="-122"/>
@@ -2404,13 +2404,13 @@
             <a:avLst/>
           </a:prstGeom>
           <a:solidFill>
-            <a:srgbClr val="059669">
+            <a:srgbClr val="2D6A4F">
               <a:alpha val="25000"/>
             </a:srgbClr>
           </a:solidFill>
           <a:ln w="12700">
             <a:solidFill>
-              <a:srgbClr val="059669"/>
+              <a:srgbClr val="2D6A4F"/>
             </a:solidFill>
             <a:prstDash val="solid"/>
           </a:ln>
@@ -2443,7 +2443,7 @@
             <a:r>
               <a:rPr lang="en-US" sz="800" dirty="0">
                 <a:solidFill>
-                  <a:srgbClr val="059669"/>
+                  <a:srgbClr val="2D6A4F"/>
                 </a:solidFill>
                 <a:latin typeface="맑은 고딕" pitchFamily="34" charset="0"/>
                 <a:ea typeface="맑은 고딕" pitchFamily="34" charset="-122"/>
@@ -2470,13 +2470,13 @@
             <a:avLst/>
           </a:prstGeom>
           <a:solidFill>
-            <a:srgbClr val="059669">
+            <a:srgbClr val="2D6A4F">
               <a:alpha val="20000"/>
             </a:srgbClr>
           </a:solidFill>
           <a:ln w="12700">
             <a:solidFill>
-              <a:srgbClr val="059669"/>
+              <a:srgbClr val="2D6A4F"/>
             </a:solidFill>
             <a:prstDash val="solid"/>
           </a:ln>
@@ -2509,7 +2509,7 @@
             <a:r>
               <a:rPr lang="en-US" sz="800" dirty="0">
                 <a:solidFill>
-                  <a:srgbClr val="059669"/>
+                  <a:srgbClr val="2D6A4F"/>
                 </a:solidFill>
                 <a:latin typeface="맑은 고딕" pitchFamily="34" charset="0"/>
                 <a:ea typeface="맑은 고딕" pitchFamily="34" charset="-122"/>
@@ -2536,13 +2536,13 @@
             <a:avLst/>
           </a:prstGeom>
           <a:solidFill>
-            <a:srgbClr val="059669">
+            <a:srgbClr val="2D6A4F">
               <a:alpha val="15000"/>
             </a:srgbClr>
           </a:solidFill>
           <a:ln w="12700">
             <a:solidFill>
-              <a:srgbClr val="059669"/>
+              <a:srgbClr val="2D6A4F"/>
             </a:solidFill>
             <a:prstDash val="solid"/>
           </a:ln>
@@ -2575,7 +2575,7 @@
             <a:r>
               <a:rPr lang="en-US" sz="800" dirty="0">
                 <a:solidFill>
-                  <a:srgbClr val="059669"/>
+                  <a:srgbClr val="2D6A4F"/>
                 </a:solidFill>
                 <a:latin typeface="맑은 고딕" pitchFamily="34" charset="0"/>
                 <a:ea typeface="맑은 고딕" pitchFamily="34" charset="-122"/>
@@ -2614,7 +2614,7 @@
             <a:r>
               <a:rPr lang="en-US" sz="900" i="1" dirty="0">
                 <a:solidFill>
-                  <a:srgbClr val="64748B"/>
+                  <a:srgbClr val="4A5568"/>
                 </a:solidFill>
                 <a:latin typeface="맑은 고딕" pitchFamily="34" charset="0"/>
                 <a:ea typeface="맑은 고딕" pitchFamily="34" charset="-122"/>
@@ -2631,7 +2631,7 @@
             <a:r>
               <a:rPr lang="en-US" sz="900" i="1" dirty="0">
                 <a:solidFill>
-                  <a:srgbClr val="64748B"/>
+                  <a:srgbClr val="4A5568"/>
                 </a:solidFill>
                 <a:latin typeface="맑은 고딕" pitchFamily="34" charset="0"/>
                 <a:ea typeface="맑은 고딕" pitchFamily="34" charset="-122"/>
